--- a/lecons/LSA/Climatology/LSA_CLIM_L02_Structure_of_the_Atmosphere.pptx
+++ b/lecons/LSA/Climatology/LSA_CLIM_L02_Structure_of_the_Atmosphere.pptx
@@ -3027,7 +3027,7 @@
           <a:p>
             <a:r>
               <a:rPr lang="en-US" dirty="0"/>
-              <a:t>Let us copy DEFINITIONS. The key terms of this lesson are defined as follows. Write each point on a new line, with the key term first. When you finish, we go to the next slide.</a:t>
+              <a:t>Let us copy the definitions. The key terms of this lesson are defined as follows. On this slide we have Homosphere. Write each point on a new line, with the key term first, and explain it in your own words when we revise. When you finish, we go to the next slide.</a:t>
             </a:r>
             <a:endParaRPr lang="en-US" dirty="0"/>
           </a:p>
@@ -3115,7 +3115,7 @@
           <a:p>
             <a:r>
               <a:rPr lang="en-US" dirty="0"/>
-              <a:t>We continue with the same part. Write each point on a new line, with the key term first.</a:t>
+              <a:t>We continue with the definitions. On this slide we have Heterosphere and Ozone layer. Write each point on a new line, with the key term first, and explain it in your own words when we revise.</a:t>
             </a:r>
             <a:endParaRPr lang="en-US" dirty="0"/>
           </a:p>
@@ -3203,7 +3203,7 @@
           <a:p>
             <a:r>
               <a:rPr lang="en-US" dirty="0"/>
-              <a:t>Let us copy Layers of the Homosphere. The homosphere is divided into the following layers. Write each point on a new line, with the key term first. When you finish, we go to the next slide.</a:t>
+              <a:t>Let us copy Layers of the Homosphere. The homosphere is divided into the following layers. On this slide we have Troposphere. Write each point on a new line, with the key term first, and explain it in your own words when we revise. When you finish, we go to the next slide.</a:t>
             </a:r>
             <a:endParaRPr lang="en-US" dirty="0"/>
           </a:p>
@@ -3291,7 +3291,7 @@
           <a:p>
             <a:r>
               <a:rPr lang="en-US" dirty="0"/>
-              <a:t>We continue with the same part. Write each point on a new line, with the key term first. When you finish, we go to the next slide.</a:t>
+              <a:t>We continue with Layers of the Homosphere. Copy this carefully. When you finish, we go to the next slide.</a:t>
             </a:r>
             <a:endParaRPr lang="en-US" dirty="0"/>
           </a:p>
@@ -3379,7 +3379,7 @@
           <a:p>
             <a:r>
               <a:rPr lang="en-US" dirty="0"/>
-              <a:t>We continue with the same part. Write each point on a new line, with the key term first.</a:t>
+              <a:t>We continue with Layers of the Homosphere. On this slide we have Stratosphere and Mesosphere. Write each point on a new line, with the key term first, and explain it in your own words when we revise.</a:t>
             </a:r>
             <a:endParaRPr lang="en-US" dirty="0"/>
           </a:p>
@@ -3643,7 +3643,7 @@
           <a:p>
             <a:r>
               <a:rPr lang="en-US" dirty="0"/>
-              <a:t>Let us copy Chemical and Thermal Characteristics. Each layer has its own chemical and thermal characteristics. Write each point on a new line, with the key term first. When you finish, we go to the next slide.</a:t>
+              <a:t>Let us copy Chemical and Thermal Characteristics. Each layer has its own chemical and thermal characteristics. On this slide we have Chemical characteristics. Write each point on a new line, with the key term first, and explain it in your own words when we revise. When you finish, we go to the next slide.</a:t>
             </a:r>
             <a:endParaRPr lang="en-US" dirty="0"/>
           </a:p>
@@ -3731,7 +3731,7 @@
           <a:p>
             <a:r>
               <a:rPr lang="en-US" dirty="0"/>
-              <a:t>We continue with the same part. Write each point on a new line, with the key term first. When you finish, we go to the next slide.</a:t>
+              <a:t>We continue with Chemical and Thermal Characteristics. Copy this carefully. When you finish, we go to the next slide.</a:t>
             </a:r>
             <a:endParaRPr lang="en-US" dirty="0"/>
           </a:p>
@@ -3819,7 +3819,7 @@
           <a:p>
             <a:r>
               <a:rPr lang="en-US" dirty="0"/>
-              <a:t>We continue with the same part. Write each point on a new line, with the key term first. When you finish, we go to the next slide.</a:t>
+              <a:t>We continue with Chemical and Thermal Characteristics. On this slide we have Temperature changes. Write each point on a new line, with the key term first, and explain it in your own words when we revise. When you finish, we go to the next slide.</a:t>
             </a:r>
             <a:endParaRPr lang="en-US" dirty="0"/>
           </a:p>
@@ -3907,7 +3907,7 @@
           <a:p>
             <a:r>
               <a:rPr lang="en-US" dirty="0"/>
-              <a:t>We continue with the same part. Write each point on a new line, with the key term first.</a:t>
+              <a:t>We continue with Chemical and Thermal Characteristics. On this slide we have Isothermal layers. Write each point on a new line, with the key term first, and explain it in your own words when we revise.</a:t>
             </a:r>
             <a:endParaRPr lang="en-US" dirty="0"/>
           </a:p>
@@ -4083,7 +4083,7 @@
           <a:p>
             <a:r>
               <a:rPr lang="en-US" dirty="0"/>
-              <a:t>Let us copy The Heterosphere. The heterosphere includes the following layers. Write each point on a new line, with the key term first. When you finish, we go to the next slide.</a:t>
+              <a:t>Let us copy The Heterosphere. The heterosphere includes the following layers. On this slide we have Thermosphere (ionosphere). Write each point on a new line, with the key term first, and explain it in your own words when we revise. When you finish, we go to the next slide.</a:t>
             </a:r>
             <a:endParaRPr lang="en-US" dirty="0"/>
           </a:p>
@@ -4171,7 +4171,7 @@
           <a:p>
             <a:r>
               <a:rPr lang="en-US" dirty="0"/>
-              <a:t>We continue with the same part. Write each point on a new line, with the key term first.</a:t>
+              <a:t>We continue with The Heterosphere. On this slide we have Exosphere. Write each point on a new line, with the key term first, and explain it in your own words when we revise.</a:t>
             </a:r>
             <a:endParaRPr lang="en-US" dirty="0"/>
           </a:p>
@@ -4259,7 +4259,7 @@
           <a:p>
             <a:r>
               <a:rPr lang="en-US" dirty="0"/>
-              <a:t>Let us copy The Ozone Layer. The ozone layer can be studied under three points. Write each point on a new line, with the key term first. When you finish, we go to the next slide.</a:t>
+              <a:t>Let us copy The Ozone Layer. The ozone layer can be studied under three points. On this slide we have Function. Write each point on a new line, with the key term first, and explain it in your own words when we revise. When you finish, we go to the next slide.</a:t>
             </a:r>
             <a:endParaRPr lang="en-US" dirty="0"/>
           </a:p>
@@ -4347,7 +4347,7 @@
           <a:p>
             <a:r>
               <a:rPr lang="en-US" dirty="0"/>
-              <a:t>We continue with the same part. Write each point on a new line, with the key term first. When you finish, we go to the next slide.</a:t>
+              <a:t>We continue with The Ozone Layer. On this slide we have Depletion. Write each point on a new line, with the key term first, and explain it in your own words when we revise. When you finish, we go to the next slide.</a:t>
             </a:r>
             <a:endParaRPr lang="en-US" dirty="0"/>
           </a:p>
@@ -4523,7 +4523,7 @@
           <a:p>
             <a:r>
               <a:rPr lang="en-US" dirty="0"/>
-              <a:t>We continue with the same part. Write each point on a new line, with the key term first.</a:t>
+              <a:t>We continue with The Ozone Layer. On this slide we have Measures. Write each point on a new line, with the key term first, and explain it in your own words when we revise.</a:t>
             </a:r>
             <a:endParaRPr lang="en-US" dirty="0"/>
           </a:p>
@@ -5403,7 +5403,7 @@
           <a:p>
             <a:r>
               <a:rPr lang="en-US" dirty="0"/>
-              <a:t>Here is the plan of our lesson today. We shall correction of the homework; then objectives and recall; then real-life situation and action to take; then learning activities; then board summary; then evaluation, remediation and homework.</a:t>
+              <a:t>Here is the plan of our lesson today. First, we shall correct the homework. Then we shall look at the objectives and recall what you already know. After that, we shall study a situation from real life and the action to take, and do the learning activities. Finally, we shall copy the board summary, do the evaluation and the remediation, and I will give you the homework.</a:t>
             </a:r>
             <a:endParaRPr lang="en-US" dirty="0"/>
           </a:p>
@@ -7207,7 +7207,7 @@
                 <a:ea typeface="Times New Roman" pitchFamily="34" charset="-122"/>
                 <a:cs typeface="Times New Roman" pitchFamily="34" charset="-120"/>
               </a:rPr>
-              <a:t>Lesson 2: Structure of the Atmosphere</a:t>
+              <a:t>Lesson 2</a:t>
             </a:r>
             <a:endParaRPr lang="en-US" sz="2600" dirty="0"/>
           </a:p>
